--- a/Nhom9_QuanLyQuanCaFe.pptx
+++ b/Nhom9_QuanLyQuanCaFe.pptx
@@ -5,13 +5,14 @@
     <p:sldMasterId id="2147483656" r:id="rId1"/>
   </p:sldMasterIdLst>
   <p:notesMasterIdLst>
-    <p:notesMasterId r:id="rId6"/>
+    <p:notesMasterId r:id="rId7"/>
   </p:notesMasterIdLst>
   <p:sldIdLst>
     <p:sldId id="256" r:id="rId2"/>
-    <p:sldId id="257" r:id="rId3"/>
-    <p:sldId id="258" r:id="rId4"/>
-    <p:sldId id="259" r:id="rId5"/>
+    <p:sldId id="260" r:id="rId3"/>
+    <p:sldId id="257" r:id="rId4"/>
+    <p:sldId id="258" r:id="rId5"/>
+    <p:sldId id="259" r:id="rId6"/>
   </p:sldIdLst>
   <p:sldSz cx="12192000" cy="6858000"/>
   <p:notesSz cx="6858000" cy="9144000"/>
@@ -1730,6 +1731,11 @@
         </p:spPr>
       </p:sp>
     </p:spTree>
+    <p:extLst>
+      <p:ext uri="{BB962C8B-B14F-4D97-AF65-F5344CB8AC3E}">
+        <p14:creationId xmlns:p14="http://schemas.microsoft.com/office/powerpoint/2010/main" val="1092641268"/>
+      </p:ext>
+    </p:extLst>
   </p:cSld>
   <p:clrMapOvr>
     <a:masterClrMapping/>
@@ -1742,7 +1748,7 @@
   <p:cSld>
     <p:spTree>
       <p:nvGrpSpPr>
-        <p:cNvPr id="1" name="Shape 76"/>
+        <p:cNvPr id="1" name="Shape 69"/>
         <p:cNvGrpSpPr/>
         <p:nvPr/>
       </p:nvGrpSpPr>
@@ -1756,7 +1762,7 @@
       </p:grpSpPr>
       <p:sp>
         <p:nvSpPr>
-          <p:cNvPr id="77" name="Google Shape;77;p3:notes"/>
+          <p:cNvPr id="70" name="Google Shape;70;p2:notes"/>
           <p:cNvSpPr txBox="1">
             <a:spLocks noGrp="1"/>
           </p:cNvSpPr>
@@ -1794,7 +1800,7 @@
       </p:sp>
       <p:sp>
         <p:nvSpPr>
-          <p:cNvPr id="78" name="Google Shape;78;p3:notes"/>
+          <p:cNvPr id="71" name="Google Shape;71;p2:notes"/>
           <p:cNvSpPr>
             <a:spLocks noGrp="1" noRot="1" noChangeAspect="1"/>
           </p:cNvSpPr>
@@ -1842,6 +1848,110 @@
 </file>
 
 <file path=ppt/notesSlides/notesSlide4.xml><?xml version="1.0" encoding="utf-8"?>
+<p:notes xmlns:a="http://schemas.openxmlformats.org/drawingml/2006/main" xmlns:r="http://schemas.openxmlformats.org/officeDocument/2006/relationships" xmlns:p="http://schemas.openxmlformats.org/presentationml/2006/main" showMasterSp="0" showMasterPhAnim="0">
+  <p:cSld>
+    <p:spTree>
+      <p:nvGrpSpPr>
+        <p:cNvPr id="1" name="Shape 76"/>
+        <p:cNvGrpSpPr/>
+        <p:nvPr/>
+      </p:nvGrpSpPr>
+      <p:grpSpPr>
+        <a:xfrm>
+          <a:off x="0" y="0"/>
+          <a:ext cx="0" cy="0"/>
+          <a:chOff x="0" y="0"/>
+          <a:chExt cx="0" cy="0"/>
+        </a:xfrm>
+      </p:grpSpPr>
+      <p:sp>
+        <p:nvSpPr>
+          <p:cNvPr id="77" name="Google Shape;77;p3:notes"/>
+          <p:cNvSpPr txBox="1">
+            <a:spLocks noGrp="1"/>
+          </p:cNvSpPr>
+          <p:nvPr>
+            <p:ph type="body" idx="1"/>
+          </p:nvPr>
+        </p:nvSpPr>
+        <p:spPr>
+          <a:xfrm>
+            <a:off x="685800" y="4400550"/>
+            <a:ext cx="5486400" cy="3600450"/>
+          </a:xfrm>
+          <a:prstGeom prst="rect">
+            <a:avLst/>
+          </a:prstGeom>
+        </p:spPr>
+        <p:txBody>
+          <a:bodyPr spcFirstLastPara="1" wrap="square" lIns="91425" tIns="45700" rIns="91425" bIns="45700" anchor="t" anchorCtr="0">
+            <a:noAutofit/>
+          </a:bodyPr>
+          <a:lstStyle/>
+          <a:p>
+            <a:pPr marL="0" lvl="0" indent="0" algn="l" rtl="0">
+              <a:spcBef>
+                <a:spcPts val="0"/>
+              </a:spcBef>
+              <a:spcAft>
+                <a:spcPts val="0"/>
+              </a:spcAft>
+              <a:buNone/>
+            </a:pPr>
+            <a:endParaRPr/>
+          </a:p>
+        </p:txBody>
+      </p:sp>
+      <p:sp>
+        <p:nvSpPr>
+          <p:cNvPr id="78" name="Google Shape;78;p3:notes"/>
+          <p:cNvSpPr>
+            <a:spLocks noGrp="1" noRot="1" noChangeAspect="1"/>
+          </p:cNvSpPr>
+          <p:nvPr>
+            <p:ph type="sldImg" idx="2"/>
+          </p:nvPr>
+        </p:nvSpPr>
+        <p:spPr>
+          <a:xfrm>
+            <a:off x="685800" y="1143000"/>
+            <a:ext cx="5486400" cy="3086100"/>
+          </a:xfrm>
+          <a:custGeom>
+            <a:avLst/>
+            <a:gdLst/>
+            <a:ahLst/>
+            <a:cxnLst/>
+            <a:rect l="l" t="t" r="r" b="b"/>
+            <a:pathLst>
+              <a:path w="120000" h="120000" extrusionOk="0">
+                <a:moveTo>
+                  <a:pt x="0" y="0"/>
+                </a:moveTo>
+                <a:lnTo>
+                  <a:pt x="120000" y="0"/>
+                </a:lnTo>
+                <a:lnTo>
+                  <a:pt x="120000" y="120000"/>
+                </a:lnTo>
+                <a:lnTo>
+                  <a:pt x="0" y="120000"/>
+                </a:lnTo>
+                <a:close/>
+              </a:path>
+            </a:pathLst>
+          </a:custGeom>
+        </p:spPr>
+      </p:sp>
+    </p:spTree>
+  </p:cSld>
+  <p:clrMapOvr>
+    <a:masterClrMapping/>
+  </p:clrMapOvr>
+</p:notes>
+</file>
+
+<file path=ppt/notesSlides/notesSlide5.xml><?xml version="1.0" encoding="utf-8"?>
 <p:notes xmlns:a="http://schemas.openxmlformats.org/drawingml/2006/main" xmlns:r="http://schemas.openxmlformats.org/officeDocument/2006/relationships" xmlns:p="http://schemas.openxmlformats.org/presentationml/2006/main" showMasterSp="0" showMasterPhAnim="0">
   <p:cSld>
     <p:spTree>
@@ -6723,7 +6833,19 @@
                 <a:cs typeface="Calibri"/>
                 <a:sym typeface="Calibri"/>
               </a:rPr>
-              <a:t>Quản lý quán cà phê</a:t>
+              <a:t>Nhóm 9 - Quản </a:t>
+            </a:r>
+            <a:r>
+              <a:rPr lang="en-US" sz="4400" b="1" i="0" u="none" strike="noStrike" cap="none" smtClean="0">
+                <a:solidFill>
+                  <a:srgbClr val="FF3300"/>
+                </a:solidFill>
+                <a:latin typeface="Calibri"/>
+                <a:ea typeface="Calibri"/>
+                <a:cs typeface="Calibri"/>
+                <a:sym typeface="Calibri"/>
+              </a:rPr>
+              <a:t>lý quán cà phê</a:t>
             </a:r>
             <a:endParaRPr sz="4400" b="1" i="0" u="none" strike="noStrike" cap="none">
               <a:solidFill>
@@ -6835,24 +6957,8 @@
           <a:p>
             <a:pPr lvl="0"/>
             <a:r>
-              <a:rPr lang="en-US"/>
-              <a:t>Mục </a:t>
-            </a:r>
-            <a:r>
               <a:rPr lang="en-US" smtClean="0"/>
-              <a:t>tiêu </a:t>
-            </a:r>
-            <a:r>
-              <a:rPr lang="en-US"/>
-              <a:t>của </a:t>
-            </a:r>
-            <a:r>
-              <a:rPr lang="en-US"/>
-              <a:t>đề </a:t>
-            </a:r>
-            <a:r>
-              <a:rPr lang="en-US" smtClean="0"/>
-              <a:t>tài:</a:t>
+              <a:t>Lý do chọn đề tài:</a:t>
             </a:r>
             <a:endParaRPr/>
           </a:p>
@@ -7288,6 +7394,11 @@
         </p:txBody>
       </p:sp>
     </p:spTree>
+    <p:extLst>
+      <p:ext uri="{BB962C8B-B14F-4D97-AF65-F5344CB8AC3E}">
+        <p14:creationId xmlns:p14="http://schemas.microsoft.com/office/powerpoint/2010/main" val="2430883746"/>
+      </p:ext>
+    </p:extLst>
   </p:cSld>
   <p:clrMapOvr>
     <a:masterClrMapping/>
@@ -7298,6 +7409,564 @@
 <file path=ppt/slides/slide3.xml><?xml version="1.0" encoding="utf-8"?>
 <p:sld xmlns:a="http://schemas.openxmlformats.org/drawingml/2006/main" xmlns:r="http://schemas.openxmlformats.org/officeDocument/2006/relationships" xmlns:p="http://schemas.openxmlformats.org/presentationml/2006/main">
   <p:cSld>
+    <p:spTree>
+      <p:nvGrpSpPr>
+        <p:cNvPr id="1" name="Shape 72"/>
+        <p:cNvGrpSpPr/>
+        <p:nvPr/>
+      </p:nvGrpSpPr>
+      <p:grpSpPr>
+        <a:xfrm>
+          <a:off x="0" y="0"/>
+          <a:ext cx="0" cy="0"/>
+          <a:chOff x="0" y="0"/>
+          <a:chExt cx="0" cy="0"/>
+        </a:xfrm>
+      </p:grpSpPr>
+      <p:sp>
+        <p:nvSpPr>
+          <p:cNvPr id="74" name="Google Shape;74;p2"/>
+          <p:cNvSpPr txBox="1">
+            <a:spLocks noGrp="1"/>
+          </p:cNvSpPr>
+          <p:nvPr>
+            <p:ph type="sldNum" idx="12"/>
+          </p:nvPr>
+        </p:nvSpPr>
+        <p:spPr>
+          <a:prstGeom prst="rect">
+            <a:avLst/>
+          </a:prstGeom>
+          <a:noFill/>
+          <a:ln>
+            <a:noFill/>
+          </a:ln>
+        </p:spPr>
+        <p:txBody>
+          <a:bodyPr spcFirstLastPara="1" wrap="square" lIns="91425" tIns="45700" rIns="91425" bIns="45700" anchor="ctr" anchorCtr="0">
+            <a:noAutofit/>
+          </a:bodyPr>
+          <a:lstStyle/>
+          <a:p>
+            <a:pPr marL="0" lvl="0" indent="0" algn="r" rtl="0">
+              <a:spcBef>
+                <a:spcPts val="0"/>
+              </a:spcBef>
+              <a:spcAft>
+                <a:spcPts val="0"/>
+              </a:spcAft>
+              <a:buNone/>
+            </a:pPr>
+            <a:fld id="{00000000-1234-1234-1234-123412341234}" type="slidenum">
+              <a:rPr lang="en-US"/>
+              <a:t>3</a:t>
+            </a:fld>
+            <a:endParaRPr/>
+          </a:p>
+        </p:txBody>
+      </p:sp>
+      <p:sp>
+        <p:nvSpPr>
+          <p:cNvPr id="75" name="Google Shape;75;p2"/>
+          <p:cNvSpPr txBox="1">
+            <a:spLocks noGrp="1"/>
+          </p:cNvSpPr>
+          <p:nvPr>
+            <p:ph type="title"/>
+          </p:nvPr>
+        </p:nvSpPr>
+        <p:spPr>
+          <a:xfrm>
+            <a:off x="501805" y="547178"/>
+            <a:ext cx="11277600" cy="854081"/>
+          </a:xfrm>
+          <a:prstGeom prst="rect">
+            <a:avLst/>
+          </a:prstGeom>
+          <a:noFill/>
+          <a:ln>
+            <a:noFill/>
+          </a:ln>
+        </p:spPr>
+        <p:txBody>
+          <a:bodyPr spcFirstLastPara="1" wrap="square" lIns="91425" tIns="45700" rIns="91425" bIns="45700" anchor="ctr" anchorCtr="0">
+            <a:normAutofit/>
+          </a:bodyPr>
+          <a:lstStyle/>
+          <a:p>
+            <a:pPr lvl="0"/>
+            <a:r>
+              <a:rPr lang="en-US"/>
+              <a:t>Mục </a:t>
+            </a:r>
+            <a:r>
+              <a:rPr lang="en-US" smtClean="0"/>
+              <a:t>tiêu </a:t>
+            </a:r>
+            <a:r>
+              <a:rPr lang="en-US"/>
+              <a:t>của </a:t>
+            </a:r>
+            <a:r>
+              <a:rPr lang="en-US"/>
+              <a:t>đề </a:t>
+            </a:r>
+            <a:r>
+              <a:rPr lang="en-US" smtClean="0"/>
+              <a:t>tài:</a:t>
+            </a:r>
+            <a:endParaRPr/>
+          </a:p>
+        </p:txBody>
+      </p:sp>
+      <p:sp>
+        <p:nvSpPr>
+          <p:cNvPr id="2" name="Text Placeholder 1"/>
+          <p:cNvSpPr>
+            <a:spLocks noGrp="1" noChangeArrowheads="1"/>
+          </p:cNvSpPr>
+          <p:nvPr>
+            <p:ph type="body" idx="1"/>
+          </p:nvPr>
+        </p:nvSpPr>
+        <p:spPr bwMode="auto">
+          <a:xfrm>
+            <a:off x="582584" y="2636159"/>
+            <a:ext cx="9420528" cy="1631216"/>
+          </a:xfrm>
+          <a:prstGeom prst="rect">
+            <a:avLst/>
+          </a:prstGeom>
+          <a:noFill/>
+          <a:ln>
+            <a:noFill/>
+          </a:ln>
+          <a:effectLst/>
+          <a:extLst>
+            <a:ext uri="{909E8E84-426E-40DD-AFC4-6F175D3DCCD1}">
+              <a14:hiddenFill xmlns:a14="http://schemas.microsoft.com/office/drawing/2010/main">
+                <a:solidFill>
+                  <a:schemeClr val="accent1"/>
+                </a:solidFill>
+              </a14:hiddenFill>
+            </a:ext>
+            <a:ext uri="{91240B29-F687-4F45-9708-019B960494DF}">
+              <a14:hiddenLine xmlns:a14="http://schemas.microsoft.com/office/drawing/2010/main" w="9525">
+                <a:solidFill>
+                  <a:schemeClr val="tx1"/>
+                </a:solidFill>
+                <a:miter lim="800000"/>
+                <a:headEnd/>
+                <a:tailEnd/>
+              </a14:hiddenLine>
+            </a:ext>
+            <a:ext uri="{AF507438-7753-43E0-B8FC-AC1667EBCBE1}">
+              <a14:hiddenEffects xmlns:a14="http://schemas.microsoft.com/office/drawing/2010/main">
+                <a:effectLst>
+                  <a:outerShdw dist="35921" dir="2700000" algn="ctr" rotWithShape="0">
+                    <a:schemeClr val="bg2"/>
+                  </a:outerShdw>
+                </a:effectLst>
+              </a14:hiddenEffects>
+            </a:ext>
+          </a:extLst>
+        </p:spPr>
+        <p:txBody>
+          <a:bodyPr vert="horz" wrap="none" lIns="91440" tIns="45720" rIns="91440" bIns="45720" numCol="1" anchor="ctr" anchorCtr="0" compatLnSpc="1">
+            <a:prstTxWarp prst="textNoShape">
+              <a:avLst/>
+            </a:prstTxWarp>
+            <a:spAutoFit/>
+          </a:bodyPr>
+          <a:lstStyle/>
+          <a:p>
+            <a:pPr marL="342900" marR="0" lvl="0" indent="-342900" defTabSz="914400" rtl="0" eaLnBrk="0" fontAlgn="base" latinLnBrk="0" hangingPunct="0">
+              <a:lnSpc>
+                <a:spcPct val="100000"/>
+              </a:lnSpc>
+              <a:spcBef>
+                <a:spcPct val="0"/>
+              </a:spcBef>
+              <a:spcAft>
+                <a:spcPct val="0"/>
+              </a:spcAft>
+              <a:buClrTx/>
+              <a:buSzTx/>
+              <a:buFont typeface="+mj-lt"/>
+              <a:buAutoNum type="arabicPeriod"/>
+              <a:tabLst/>
+            </a:pPr>
+            <a:r>
+              <a:rPr kumimoji="0" lang="en-US" altLang="en-US" sz="2000" b="0" i="0" u="none" strike="noStrike" cap="none" normalizeH="0" baseline="0" smtClean="0">
+                <a:ln>
+                  <a:noFill/>
+                </a:ln>
+                <a:solidFill>
+                  <a:schemeClr val="tx1"/>
+                </a:solidFill>
+                <a:effectLst/>
+                <a:latin typeface="Times New Roman" panose="02020603050405020304" pitchFamily="18" charset="0"/>
+                <a:cs typeface="Times New Roman" panose="02020603050405020304" pitchFamily="18" charset="0"/>
+              </a:rPr>
+              <a:t>Giúp </a:t>
+            </a:r>
+            <a:r>
+              <a:rPr kumimoji="0" lang="en-US" altLang="en-US" sz="2000" b="0" i="0" u="none" strike="noStrike" cap="none" normalizeH="0" baseline="0" smtClean="0">
+                <a:ln>
+                  <a:noFill/>
+                </a:ln>
+                <a:solidFill>
+                  <a:schemeClr val="tx1"/>
+                </a:solidFill>
+                <a:effectLst/>
+                <a:latin typeface="Times New Roman" panose="02020603050405020304" pitchFamily="18" charset="0"/>
+                <a:cs typeface="Times New Roman" panose="02020603050405020304" pitchFamily="18" charset="0"/>
+              </a:rPr>
+              <a:t>chủ quán dễ dàng quản lý order, hóa đơn và tính tiền nhanh hơn khi đông khách. </a:t>
+            </a:r>
+          </a:p>
+          <a:p>
+            <a:pPr marL="342900" marR="0" lvl="0" indent="-342900" defTabSz="914400" rtl="0" eaLnBrk="0" fontAlgn="base" latinLnBrk="0" hangingPunct="0">
+              <a:lnSpc>
+                <a:spcPct val="100000"/>
+              </a:lnSpc>
+              <a:spcBef>
+                <a:spcPct val="0"/>
+              </a:spcBef>
+              <a:spcAft>
+                <a:spcPct val="0"/>
+              </a:spcAft>
+              <a:buClrTx/>
+              <a:buSzTx/>
+              <a:buFont typeface="+mj-lt"/>
+              <a:buAutoNum type="arabicPeriod"/>
+              <a:tabLst/>
+            </a:pPr>
+            <a:r>
+              <a:rPr kumimoji="0" lang="en-US" altLang="en-US" sz="2000" b="0" i="0" u="none" strike="noStrike" cap="none" normalizeH="0" baseline="0" smtClean="0">
+                <a:ln>
+                  <a:noFill/>
+                </a:ln>
+                <a:solidFill>
+                  <a:schemeClr val="tx1"/>
+                </a:solidFill>
+                <a:effectLst/>
+                <a:latin typeface="Times New Roman" panose="02020603050405020304" pitchFamily="18" charset="0"/>
+                <a:cs typeface="Times New Roman" panose="02020603050405020304" pitchFamily="18" charset="0"/>
+              </a:rPr>
+              <a:t>Theo dõi doanh thu từng ngày mà không cần ghi chép thủ </a:t>
+            </a:r>
+            <a:r>
+              <a:rPr kumimoji="0" lang="en-US" altLang="en-US" sz="2000" b="0" i="0" u="none" strike="noStrike" cap="none" normalizeH="0" baseline="0" smtClean="0">
+                <a:ln>
+                  <a:noFill/>
+                </a:ln>
+                <a:solidFill>
+                  <a:schemeClr val="tx1"/>
+                </a:solidFill>
+                <a:effectLst/>
+                <a:latin typeface="Times New Roman" panose="02020603050405020304" pitchFamily="18" charset="0"/>
+                <a:cs typeface="Times New Roman" panose="02020603050405020304" pitchFamily="18" charset="0"/>
+              </a:rPr>
+              <a:t>công </a:t>
+            </a:r>
+            <a:r>
+              <a:rPr kumimoji="0" lang="en-US" altLang="en-US" sz="2000" b="0" i="0" u="none" strike="noStrike" cap="none" normalizeH="0" baseline="0" smtClean="0">
+                <a:ln>
+                  <a:noFill/>
+                </a:ln>
+                <a:solidFill>
+                  <a:schemeClr val="tx1"/>
+                </a:solidFill>
+                <a:effectLst/>
+                <a:latin typeface="Times New Roman" panose="02020603050405020304" pitchFamily="18" charset="0"/>
+                <a:cs typeface="Times New Roman" panose="02020603050405020304" pitchFamily="18" charset="0"/>
+              </a:rPr>
+              <a:t>tránh</a:t>
+            </a:r>
+            <a:r>
+              <a:rPr kumimoji="0" lang="en-US" altLang="en-US" sz="2000" b="0" i="0" u="none" strike="noStrike" cap="none" normalizeH="0" smtClean="0">
+                <a:ln>
+                  <a:noFill/>
+                </a:ln>
+                <a:solidFill>
+                  <a:schemeClr val="tx1"/>
+                </a:solidFill>
+                <a:effectLst/>
+                <a:latin typeface="Times New Roman" panose="02020603050405020304" pitchFamily="18" charset="0"/>
+                <a:cs typeface="Times New Roman" panose="02020603050405020304" pitchFamily="18" charset="0"/>
+              </a:rPr>
+              <a:t> </a:t>
+            </a:r>
+            <a:r>
+              <a:rPr kumimoji="0" lang="en-US" altLang="en-US" sz="2000" b="0" i="0" u="none" strike="noStrike" cap="none" normalizeH="0" baseline="0" smtClean="0">
+                <a:ln>
+                  <a:noFill/>
+                </a:ln>
+                <a:solidFill>
+                  <a:schemeClr val="tx1"/>
+                </a:solidFill>
+                <a:effectLst/>
+                <a:latin typeface="Times New Roman" panose="02020603050405020304" pitchFamily="18" charset="0"/>
+                <a:cs typeface="Times New Roman" panose="02020603050405020304" pitchFamily="18" charset="0"/>
+              </a:rPr>
+              <a:t>bị </a:t>
+            </a:r>
+            <a:r>
+              <a:rPr kumimoji="0" lang="en-US" altLang="en-US" sz="2000" b="0" i="0" u="none" strike="noStrike" cap="none" normalizeH="0" baseline="0" smtClean="0">
+                <a:ln>
+                  <a:noFill/>
+                </a:ln>
+                <a:solidFill>
+                  <a:schemeClr val="tx1"/>
+                </a:solidFill>
+                <a:effectLst/>
+                <a:latin typeface="Times New Roman" panose="02020603050405020304" pitchFamily="18" charset="0"/>
+                <a:cs typeface="Times New Roman" panose="02020603050405020304" pitchFamily="18" charset="0"/>
+              </a:rPr>
+              <a:t>sai sót. </a:t>
+            </a:r>
+          </a:p>
+          <a:p>
+            <a:pPr marL="342900" marR="0" lvl="0" indent="-342900" defTabSz="914400" rtl="0" eaLnBrk="0" fontAlgn="base" latinLnBrk="0" hangingPunct="0">
+              <a:lnSpc>
+                <a:spcPct val="100000"/>
+              </a:lnSpc>
+              <a:spcBef>
+                <a:spcPct val="0"/>
+              </a:spcBef>
+              <a:spcAft>
+                <a:spcPct val="0"/>
+              </a:spcAft>
+              <a:buClrTx/>
+              <a:buSzTx/>
+              <a:buFont typeface="+mj-lt"/>
+              <a:buAutoNum type="arabicPeriod"/>
+              <a:tabLst/>
+            </a:pPr>
+            <a:r>
+              <a:rPr kumimoji="0" lang="en-US" altLang="en-US" sz="2000" b="0" i="0" u="none" strike="noStrike" cap="none" normalizeH="0" baseline="0" smtClean="0">
+                <a:ln>
+                  <a:noFill/>
+                </a:ln>
+                <a:solidFill>
+                  <a:schemeClr val="tx1"/>
+                </a:solidFill>
+                <a:effectLst/>
+                <a:latin typeface="Times New Roman" panose="02020603050405020304" pitchFamily="18" charset="0"/>
+                <a:cs typeface="Times New Roman" panose="02020603050405020304" pitchFamily="18" charset="0"/>
+              </a:rPr>
+              <a:t>Quản lý menu (thêm, sửa, xóa món</a:t>
+            </a:r>
+            <a:r>
+              <a:rPr kumimoji="0" lang="en-US" altLang="en-US" sz="2000" b="0" i="0" u="none" strike="noStrike" cap="none" normalizeH="0" baseline="0" smtClean="0">
+                <a:ln>
+                  <a:noFill/>
+                </a:ln>
+                <a:solidFill>
+                  <a:schemeClr val="tx1"/>
+                </a:solidFill>
+                <a:effectLst/>
+                <a:latin typeface="Times New Roman" panose="02020603050405020304" pitchFamily="18" charset="0"/>
+                <a:cs typeface="Times New Roman" panose="02020603050405020304" pitchFamily="18" charset="0"/>
+              </a:rPr>
+              <a:t>) </a:t>
+            </a:r>
+            <a:r>
+              <a:rPr kumimoji="0" lang="en-US" altLang="en-US" sz="2000" b="0" i="0" u="none" strike="noStrike" cap="none" normalizeH="0" baseline="0" smtClean="0">
+                <a:ln>
+                  <a:noFill/>
+                </a:ln>
+                <a:solidFill>
+                  <a:schemeClr val="tx1"/>
+                </a:solidFill>
+                <a:effectLst/>
+                <a:latin typeface="Times New Roman" panose="02020603050405020304" pitchFamily="18" charset="0"/>
+                <a:cs typeface="Times New Roman" panose="02020603050405020304" pitchFamily="18" charset="0"/>
+              </a:rPr>
+              <a:t>khi </a:t>
+            </a:r>
+            <a:r>
+              <a:rPr kumimoji="0" lang="en-US" altLang="en-US" sz="2000" b="0" i="0" u="none" strike="noStrike" cap="none" normalizeH="0" baseline="0" smtClean="0">
+                <a:ln>
+                  <a:noFill/>
+                </a:ln>
+                <a:solidFill>
+                  <a:schemeClr val="tx1"/>
+                </a:solidFill>
+                <a:effectLst/>
+                <a:latin typeface="Times New Roman" panose="02020603050405020304" pitchFamily="18" charset="0"/>
+                <a:cs typeface="Times New Roman" panose="02020603050405020304" pitchFamily="18" charset="0"/>
+              </a:rPr>
+              <a:t>quán thay đổi giá hoặc món mới. </a:t>
+            </a:r>
+          </a:p>
+          <a:p>
+            <a:pPr marL="342900" marR="0" lvl="0" indent="-342900" defTabSz="914400" rtl="0" eaLnBrk="0" fontAlgn="base" latinLnBrk="0" hangingPunct="0">
+              <a:lnSpc>
+                <a:spcPct val="100000"/>
+              </a:lnSpc>
+              <a:spcBef>
+                <a:spcPct val="0"/>
+              </a:spcBef>
+              <a:spcAft>
+                <a:spcPct val="0"/>
+              </a:spcAft>
+              <a:buClrTx/>
+              <a:buSzTx/>
+              <a:buFont typeface="+mj-lt"/>
+              <a:buAutoNum type="arabicPeriod"/>
+              <a:tabLst/>
+            </a:pPr>
+            <a:r>
+              <a:rPr kumimoji="0" lang="en-US" altLang="en-US" sz="2000" b="0" i="0" u="none" strike="noStrike" cap="none" normalizeH="0" baseline="0" smtClean="0">
+                <a:ln>
+                  <a:noFill/>
+                </a:ln>
+                <a:solidFill>
+                  <a:schemeClr val="tx1"/>
+                </a:solidFill>
+                <a:effectLst/>
+                <a:latin typeface="Times New Roman" panose="02020603050405020304" pitchFamily="18" charset="0"/>
+                <a:cs typeface="Times New Roman" panose="02020603050405020304" pitchFamily="18" charset="0"/>
+              </a:rPr>
+              <a:t>Kiểm soát nhân viên (ai bán gì, ca làm) để hạn chế </a:t>
+            </a:r>
+            <a:r>
+              <a:rPr kumimoji="0" lang="en-US" altLang="en-US" sz="2000" b="0" i="0" u="none" strike="noStrike" cap="none" normalizeH="0" baseline="0" smtClean="0">
+                <a:ln>
+                  <a:noFill/>
+                </a:ln>
+                <a:solidFill>
+                  <a:schemeClr val="tx1"/>
+                </a:solidFill>
+                <a:effectLst/>
+                <a:latin typeface="Times New Roman" panose="02020603050405020304" pitchFamily="18" charset="0"/>
+                <a:cs typeface="Times New Roman" panose="02020603050405020304" pitchFamily="18" charset="0"/>
+              </a:rPr>
+              <a:t>nhầm </a:t>
+            </a:r>
+            <a:r>
+              <a:rPr kumimoji="0" lang="en-US" altLang="en-US" sz="2000" b="0" i="0" u="none" strike="noStrike" cap="none" normalizeH="0" baseline="0" smtClean="0">
+                <a:ln>
+                  <a:noFill/>
+                </a:ln>
+                <a:solidFill>
+                  <a:schemeClr val="tx1"/>
+                </a:solidFill>
+                <a:effectLst/>
+                <a:latin typeface="Times New Roman" panose="02020603050405020304" pitchFamily="18" charset="0"/>
+                <a:cs typeface="Times New Roman" panose="02020603050405020304" pitchFamily="18" charset="0"/>
+              </a:rPr>
+              <a:t>lẫn.</a:t>
+            </a:r>
+            <a:endParaRPr kumimoji="0" lang="en-US" altLang="en-US" sz="2000" b="0" i="0" u="none" strike="noStrike" cap="none" normalizeH="0" baseline="0" smtClean="0">
+              <a:ln>
+                <a:noFill/>
+              </a:ln>
+              <a:solidFill>
+                <a:schemeClr val="tx1"/>
+              </a:solidFill>
+              <a:effectLst/>
+              <a:latin typeface="Times New Roman" panose="02020603050405020304" pitchFamily="18" charset="0"/>
+              <a:cs typeface="Times New Roman" panose="02020603050405020304" pitchFamily="18" charset="0"/>
+            </a:endParaRPr>
+          </a:p>
+          <a:p>
+            <a:pPr marL="342900" marR="0" lvl="0" indent="-342900" defTabSz="914400" rtl="0" eaLnBrk="0" fontAlgn="base" latinLnBrk="0" hangingPunct="0">
+              <a:lnSpc>
+                <a:spcPct val="100000"/>
+              </a:lnSpc>
+              <a:spcBef>
+                <a:spcPct val="0"/>
+              </a:spcBef>
+              <a:spcAft>
+                <a:spcPct val="0"/>
+              </a:spcAft>
+              <a:buClrTx/>
+              <a:buSzTx/>
+              <a:buFont typeface="+mj-lt"/>
+              <a:buAutoNum type="arabicPeriod"/>
+              <a:tabLst/>
+            </a:pPr>
+            <a:r>
+              <a:rPr kumimoji="0" lang="en-US" altLang="en-US" sz="2000" b="0" i="0" u="none" strike="noStrike" cap="none" normalizeH="0" baseline="0" smtClean="0">
+                <a:ln>
+                  <a:noFill/>
+                </a:ln>
+                <a:solidFill>
+                  <a:schemeClr val="tx1"/>
+                </a:solidFill>
+                <a:effectLst/>
+                <a:latin typeface="Times New Roman" panose="02020603050405020304" pitchFamily="18" charset="0"/>
+                <a:cs typeface="Times New Roman" panose="02020603050405020304" pitchFamily="18" charset="0"/>
+              </a:rPr>
+              <a:t>Giúp phục vụ </a:t>
+            </a:r>
+            <a:r>
+              <a:rPr kumimoji="0" lang="en-US" altLang="en-US" sz="2000" b="0" i="0" u="none" strike="noStrike" cap="none" normalizeH="0" baseline="0" smtClean="0">
+                <a:ln>
+                  <a:noFill/>
+                </a:ln>
+                <a:solidFill>
+                  <a:schemeClr val="tx1"/>
+                </a:solidFill>
+                <a:effectLst/>
+                <a:latin typeface="Times New Roman" panose="02020603050405020304" pitchFamily="18" charset="0"/>
+                <a:cs typeface="Times New Roman" panose="02020603050405020304" pitchFamily="18" charset="0"/>
+              </a:rPr>
+              <a:t>khách </a:t>
+            </a:r>
+            <a:r>
+              <a:rPr kumimoji="0" lang="en-US" altLang="en-US" sz="2000" b="0" i="0" u="none" strike="noStrike" cap="none" normalizeH="0" baseline="0" smtClean="0">
+                <a:ln>
+                  <a:noFill/>
+                </a:ln>
+                <a:solidFill>
+                  <a:schemeClr val="tx1"/>
+                </a:solidFill>
+                <a:effectLst/>
+                <a:latin typeface="Times New Roman" panose="02020603050405020304" pitchFamily="18" charset="0"/>
+                <a:cs typeface="Times New Roman" panose="02020603050405020304" pitchFamily="18" charset="0"/>
+              </a:rPr>
+              <a:t>tốt </a:t>
+            </a:r>
+            <a:r>
+              <a:rPr kumimoji="0" lang="en-US" altLang="en-US" sz="2000" b="0" i="0" u="none" strike="noStrike" cap="none" normalizeH="0" baseline="0" smtClean="0">
+                <a:ln>
+                  <a:noFill/>
+                </a:ln>
+                <a:solidFill>
+                  <a:schemeClr val="tx1"/>
+                </a:solidFill>
+                <a:effectLst/>
+                <a:latin typeface="Times New Roman" panose="02020603050405020304" pitchFamily="18" charset="0"/>
+                <a:cs typeface="Times New Roman" panose="02020603050405020304" pitchFamily="18" charset="0"/>
+              </a:rPr>
+              <a:t>hơn, giảm thời gian chờ và tránh tính sai tiền. </a:t>
+            </a:r>
+          </a:p>
+        </p:txBody>
+      </p:sp>
+    </p:spTree>
+  </p:cSld>
+  <p:clrMapOvr>
+    <a:masterClrMapping/>
+  </p:clrMapOvr>
+</p:sld>
+</file>
+
+<file path=ppt/slides/slide4.xml><?xml version="1.0" encoding="utf-8"?>
+<p:sld xmlns:a="http://schemas.openxmlformats.org/drawingml/2006/main" xmlns:r="http://schemas.openxmlformats.org/officeDocument/2006/relationships" xmlns:p="http://schemas.openxmlformats.org/presentationml/2006/main" showMasterSp="0">
+  <p:cSld>
+    <p:bg>
+      <p:bgPr>
+        <a:solidFill>
+          <a:schemeClr val="bg1"/>
+        </a:solidFill>
+        <a:effectLst/>
+      </p:bgPr>
+    </p:bg>
     <p:spTree>
       <p:nvGrpSpPr>
         <p:cNvPr id="1" name="Shape 79"/>
@@ -7314,52 +7983,6 @@
       </p:grpSpPr>
       <p:sp>
         <p:nvSpPr>
-          <p:cNvPr id="80" name="Google Shape;80;p3"/>
-          <p:cNvSpPr txBox="1">
-            <a:spLocks noGrp="1"/>
-          </p:cNvSpPr>
-          <p:nvPr>
-            <p:ph type="body" idx="1"/>
-          </p:nvPr>
-        </p:nvSpPr>
-        <p:spPr>
-          <a:prstGeom prst="rect">
-            <a:avLst/>
-          </a:prstGeom>
-          <a:noFill/>
-          <a:ln>
-            <a:noFill/>
-          </a:ln>
-        </p:spPr>
-        <p:txBody>
-          <a:bodyPr spcFirstLastPara="1" wrap="square" lIns="91425" tIns="45700" rIns="91425" bIns="45700" anchor="t" anchorCtr="0">
-            <a:normAutofit/>
-          </a:bodyPr>
-          <a:lstStyle/>
-          <a:p>
-            <a:pPr marL="0" marR="0" lvl="0" indent="0" algn="just" rtl="0">
-              <a:lnSpc>
-                <a:spcPct val="120000"/>
-              </a:lnSpc>
-              <a:spcBef>
-                <a:spcPts val="0"/>
-              </a:spcBef>
-              <a:spcAft>
-                <a:spcPts val="0"/>
-              </a:spcAft>
-              <a:buClr>
-                <a:srgbClr val="0000FF"/>
-              </a:buClr>
-              <a:buSzPts val="2400"/>
-              <a:buFont typeface="Noto Sans Symbols"/>
-              <a:buNone/>
-            </a:pPr>
-            <a:endParaRPr/>
-          </a:p>
-        </p:txBody>
-      </p:sp>
-      <p:sp>
-        <p:nvSpPr>
           <p:cNvPr id="81" name="Google Shape;81;p3"/>
           <p:cNvSpPr txBox="1">
             <a:spLocks noGrp="1"/>
@@ -7394,55 +8017,36 @@
             </a:pPr>
             <a:fld id="{00000000-1234-1234-1234-123412341234}" type="slidenum">
               <a:rPr lang="en-US"/>
-              <a:t>3</a:t>
+              <a:t>4</a:t>
             </a:fld>
             <a:endParaRPr/>
           </a:p>
         </p:txBody>
       </p:sp>
-      <p:sp>
-        <p:nvSpPr>
-          <p:cNvPr id="82" name="Google Shape;82;p3"/>
-          <p:cNvSpPr txBox="1">
-            <a:spLocks noGrp="1"/>
-          </p:cNvSpPr>
-          <p:nvPr>
-            <p:ph type="title"/>
-          </p:nvPr>
-        </p:nvSpPr>
+      <p:pic>
+        <p:nvPicPr>
+          <p:cNvPr id="6" name="Picture 5"/>
+          <p:cNvPicPr>
+            <a:picLocks noChangeAspect="1"/>
+          </p:cNvPicPr>
+          <p:nvPr/>
+        </p:nvPicPr>
+        <p:blipFill>
+          <a:blip r:embed="rId3"/>
+          <a:stretch>
+            <a:fillRect/>
+          </a:stretch>
+        </p:blipFill>
         <p:spPr>
+          <a:xfrm>
+            <a:off x="825190" y="0"/>
+            <a:ext cx="10623396" cy="6857999"/>
+          </a:xfrm>
           <a:prstGeom prst="rect">
             <a:avLst/>
           </a:prstGeom>
-          <a:noFill/>
-          <a:ln>
-            <a:noFill/>
-          </a:ln>
         </p:spPr>
-        <p:txBody>
-          <a:bodyPr spcFirstLastPara="1" wrap="square" lIns="91425" tIns="45700" rIns="91425" bIns="45700" anchor="ctr" anchorCtr="0">
-            <a:normAutofit/>
-          </a:bodyPr>
-          <a:lstStyle/>
-          <a:p>
-            <a:pPr marL="0" lvl="0" indent="0" algn="l" rtl="0">
-              <a:spcBef>
-                <a:spcPts val="0"/>
-              </a:spcBef>
-              <a:spcAft>
-                <a:spcPts val="0"/>
-              </a:spcAft>
-              <a:buClr>
-                <a:srgbClr val="FF0000"/>
-              </a:buClr>
-              <a:buSzPts val="3200"/>
-              <a:buFont typeface="Times New Roman"/>
-              <a:buNone/>
-            </a:pPr>
-            <a:endParaRPr/>
-          </a:p>
-        </p:txBody>
-      </p:sp>
+      </p:pic>
     </p:spTree>
   </p:cSld>
   <p:clrMapOvr>
@@ -7451,7 +8055,7 @@
 </p:sld>
 </file>
 
-<file path=ppt/slides/slide4.xml><?xml version="1.0" encoding="utf-8"?>
+<file path=ppt/slides/slide5.xml><?xml version="1.0" encoding="utf-8"?>
 <p:sld xmlns:a="http://schemas.openxmlformats.org/drawingml/2006/main" xmlns:r="http://schemas.openxmlformats.org/officeDocument/2006/relationships" xmlns:p="http://schemas.openxmlformats.org/presentationml/2006/main">
   <p:cSld>
     <p:spTree>
@@ -7504,7 +8108,7 @@
             </a:pPr>
             <a:fld id="{00000000-1234-1234-1234-123412341234}" type="slidenum">
               <a:rPr lang="en-US"/>
-              <a:t>4</a:t>
+              <a:t>5</a:t>
             </a:fld>
             <a:endParaRPr/>
           </a:p>
@@ -7524,7 +8128,7 @@
         </p:nvGraphicFramePr>
         <p:xfrm>
           <a:off x="457200" y="2633164"/>
-          <a:ext cx="11463454" cy="1645920"/>
+          <a:ext cx="11463454" cy="1526465"/>
         </p:xfrm>
         <a:graphic>
           <a:graphicData uri="http://schemas.openxmlformats.org/drawingml/2006/table">
